--- a/skills/beautiful-slides/charts/line/example-editorial-magazine.pptx
+++ b/skills/beautiful-slides/charts/line/example-editorial-magazine.pptx
@@ -3193,7 +3193,7 @@
             <a:r>
               <a:rPr sz="1300" b="0">
                 <a:solidFill>
-                  <a:srgbClr val="6F675F"/>
+                  <a:srgbClr val="181514"/>
                 </a:solidFill>
                 <a:latin typeface="Newsreader"/>
               </a:rPr>
@@ -4173,7 +4173,7 @@
             <a:r>
               <a:rPr sz="1300" b="0">
                 <a:solidFill>
-                  <a:srgbClr val="6F675F"/>
+                  <a:srgbClr val="181514"/>
                 </a:solidFill>
                 <a:latin typeface="Newsreader"/>
               </a:rPr>
@@ -4640,7 +4640,7 @@
             <a:r>
               <a:rPr sz="1200" b="0">
                 <a:solidFill>
-                  <a:srgbClr val="6F675F"/>
+                  <a:srgbClr val="181514"/>
                 </a:solidFill>
                 <a:latin typeface="Newsreader"/>
               </a:rPr>
@@ -5107,7 +5107,7 @@
             <a:r>
               <a:rPr sz="1200" b="0">
                 <a:solidFill>
-                  <a:srgbClr val="6F675F"/>
+                  <a:srgbClr val="181514"/>
                 </a:solidFill>
                 <a:latin typeface="Newsreader"/>
               </a:rPr>
@@ -5430,7 +5430,7 @@
             <a:r>
               <a:rPr sz="1200" b="0">
                 <a:solidFill>
-                  <a:srgbClr val="6F675F"/>
+                  <a:srgbClr val="181514"/>
                 </a:solidFill>
                 <a:latin typeface="Newsreader"/>
               </a:rPr>
@@ -5658,7 +5658,7 @@
             <a:r>
               <a:rPr sz="1200" b="1">
                 <a:solidFill>
-                  <a:srgbClr val="8C2F39"/>
+                  <a:srgbClr val="181514"/>
                 </a:solidFill>
                 <a:latin typeface="Newsreader"/>
               </a:rPr>
